--- a/docs/dda_impurity.pptx
+++ b/docs/dda_impurity.pptx
@@ -8,7 +8,9 @@
     <p:sldId id="256" r:id="rId2"/>
     <p:sldId id="257" r:id="rId3"/>
     <p:sldId id="258" r:id="rId4"/>
-    <p:sldId id="259" r:id="rId5"/>
+    <p:sldId id="261" r:id="rId5"/>
+    <p:sldId id="260" r:id="rId6"/>
+    <p:sldId id="259" r:id="rId7"/>
   </p:sldIdLst>
   <p:sldSz cx="12192000" cy="6858000"/>
   <p:notesSz cx="6858000" cy="9144000"/>
@@ -107,6 +109,11 @@
       </a:defRPr>
     </a:lvl9pPr>
   </p:defaultTextStyle>
+  <p:extLst>
+    <p:ext uri="{EFAFB233-063F-42B5-8137-9DF3F51BA10A}">
+      <p15:sldGuideLst xmlns:p15="http://schemas.microsoft.com/office/powerpoint/2012/main"/>
+    </p:ext>
+  </p:extLst>
 </p:presentation>
 </file>
 
@@ -259,7 +266,7 @@
           <a:p>
             <a:fld id="{4AD6CE59-DF2D-4B5B-9BC5-C1E946ABEF32}" type="datetimeFigureOut">
               <a:rPr lang="en-AT" smtClean="0"/>
-              <a:t>22/07/2025</a:t>
+              <a:t>07/22/2025</a:t>
             </a:fld>
             <a:endParaRPr lang="en-AT"/>
           </a:p>
@@ -459,7 +466,7 @@
           <a:p>
             <a:fld id="{4AD6CE59-DF2D-4B5B-9BC5-C1E946ABEF32}" type="datetimeFigureOut">
               <a:rPr lang="en-AT" smtClean="0"/>
-              <a:t>22/07/2025</a:t>
+              <a:t>07/22/2025</a:t>
             </a:fld>
             <a:endParaRPr lang="en-AT"/>
           </a:p>
@@ -669,7 +676,7 @@
           <a:p>
             <a:fld id="{4AD6CE59-DF2D-4B5B-9BC5-C1E946ABEF32}" type="datetimeFigureOut">
               <a:rPr lang="en-AT" smtClean="0"/>
-              <a:t>22/07/2025</a:t>
+              <a:t>07/22/2025</a:t>
             </a:fld>
             <a:endParaRPr lang="en-AT"/>
           </a:p>
@@ -869,7 +876,7 @@
           <a:p>
             <a:fld id="{4AD6CE59-DF2D-4B5B-9BC5-C1E946ABEF32}" type="datetimeFigureOut">
               <a:rPr lang="en-AT" smtClean="0"/>
-              <a:t>22/07/2025</a:t>
+              <a:t>07/22/2025</a:t>
             </a:fld>
             <a:endParaRPr lang="en-AT"/>
           </a:p>
@@ -1145,7 +1152,7 @@
           <a:p>
             <a:fld id="{4AD6CE59-DF2D-4B5B-9BC5-C1E946ABEF32}" type="datetimeFigureOut">
               <a:rPr lang="en-AT" smtClean="0"/>
-              <a:t>22/07/2025</a:t>
+              <a:t>07/22/2025</a:t>
             </a:fld>
             <a:endParaRPr lang="en-AT"/>
           </a:p>
@@ -1413,7 +1420,7 @@
           <a:p>
             <a:fld id="{4AD6CE59-DF2D-4B5B-9BC5-C1E946ABEF32}" type="datetimeFigureOut">
               <a:rPr lang="en-AT" smtClean="0"/>
-              <a:t>22/07/2025</a:t>
+              <a:t>07/22/2025</a:t>
             </a:fld>
             <a:endParaRPr lang="en-AT"/>
           </a:p>
@@ -1828,7 +1835,7 @@
           <a:p>
             <a:fld id="{4AD6CE59-DF2D-4B5B-9BC5-C1E946ABEF32}" type="datetimeFigureOut">
               <a:rPr lang="en-AT" smtClean="0"/>
-              <a:t>22/07/2025</a:t>
+              <a:t>07/22/2025</a:t>
             </a:fld>
             <a:endParaRPr lang="en-AT"/>
           </a:p>
@@ -1970,7 +1977,7 @@
           <a:p>
             <a:fld id="{4AD6CE59-DF2D-4B5B-9BC5-C1E946ABEF32}" type="datetimeFigureOut">
               <a:rPr lang="en-AT" smtClean="0"/>
-              <a:t>22/07/2025</a:t>
+              <a:t>07/22/2025</a:t>
             </a:fld>
             <a:endParaRPr lang="en-AT"/>
           </a:p>
@@ -2083,7 +2090,7 @@
           <a:p>
             <a:fld id="{4AD6CE59-DF2D-4B5B-9BC5-C1E946ABEF32}" type="datetimeFigureOut">
               <a:rPr lang="en-AT" smtClean="0"/>
-              <a:t>22/07/2025</a:t>
+              <a:t>07/22/2025</a:t>
             </a:fld>
             <a:endParaRPr lang="en-AT"/>
           </a:p>
@@ -2396,7 +2403,7 @@
           <a:p>
             <a:fld id="{4AD6CE59-DF2D-4B5B-9BC5-C1E946ABEF32}" type="datetimeFigureOut">
               <a:rPr lang="en-AT" smtClean="0"/>
-              <a:t>22/07/2025</a:t>
+              <a:t>07/22/2025</a:t>
             </a:fld>
             <a:endParaRPr lang="en-AT"/>
           </a:p>
@@ -2685,7 +2692,7 @@
           <a:p>
             <a:fld id="{4AD6CE59-DF2D-4B5B-9BC5-C1E946ABEF32}" type="datetimeFigureOut">
               <a:rPr lang="en-AT" smtClean="0"/>
-              <a:t>22/07/2025</a:t>
+              <a:t>07/22/2025</a:t>
             </a:fld>
             <a:endParaRPr lang="en-AT"/>
           </a:p>
@@ -2928,7 +2935,7 @@
           <a:p>
             <a:fld id="{4AD6CE59-DF2D-4B5B-9BC5-C1E946ABEF32}" type="datetimeFigureOut">
               <a:rPr lang="en-AT" smtClean="0"/>
-              <a:t>22/07/2025</a:t>
+              <a:t>07/22/2025</a:t>
             </a:fld>
             <a:endParaRPr lang="en-AT"/>
           </a:p>
@@ -4165,6 +4172,126 @@
 </file>
 
 <file path=ppt/slides/slide4.xml><?xml version="1.0" encoding="utf-8"?>
+<p:sld xmlns:a="http://schemas.openxmlformats.org/drawingml/2006/main" xmlns:r="http://schemas.openxmlformats.org/officeDocument/2006/relationships" xmlns:p="http://schemas.openxmlformats.org/presentationml/2006/main">
+  <p:cSld>
+    <p:spTree>
+      <p:nvGrpSpPr>
+        <p:cNvPr id="1" name=""/>
+        <p:cNvGrpSpPr/>
+        <p:nvPr/>
+      </p:nvGrpSpPr>
+      <p:grpSpPr>
+        <a:xfrm>
+          <a:off x="0" y="0"/>
+          <a:ext cx="0" cy="0"/>
+          <a:chOff x="0" y="0"/>
+          <a:chExt cx="0" cy="0"/>
+        </a:xfrm>
+      </p:grpSpPr>
+      <p:pic>
+        <p:nvPicPr>
+          <p:cNvPr id="5" name="Picture 4">
+            <a:extLst>
+              <a:ext uri="{FF2B5EF4-FFF2-40B4-BE49-F238E27FC236}">
+                <a16:creationId xmlns:a16="http://schemas.microsoft.com/office/drawing/2014/main" id="{86553CAE-3458-3BDC-5A75-5247EB43CBC5}"/>
+              </a:ext>
+            </a:extLst>
+          </p:cNvPr>
+          <p:cNvPicPr>
+            <a:picLocks noChangeAspect="1"/>
+          </p:cNvPicPr>
+          <p:nvPr/>
+        </p:nvPicPr>
+        <p:blipFill>
+          <a:blip r:embed="rId2"/>
+          <a:stretch>
+            <a:fillRect/>
+          </a:stretch>
+        </p:blipFill>
+        <p:spPr>
+          <a:xfrm>
+            <a:off x="0" y="152400"/>
+            <a:ext cx="12192000" cy="6553200"/>
+          </a:xfrm>
+          <a:prstGeom prst="rect">
+            <a:avLst/>
+          </a:prstGeom>
+        </p:spPr>
+      </p:pic>
+    </p:spTree>
+    <p:extLst>
+      <p:ext uri="{BB962C8B-B14F-4D97-AF65-F5344CB8AC3E}">
+        <p14:creationId xmlns:p14="http://schemas.microsoft.com/office/powerpoint/2010/main" val="1640173982"/>
+      </p:ext>
+    </p:extLst>
+  </p:cSld>
+  <p:clrMapOvr>
+    <a:masterClrMapping/>
+  </p:clrMapOvr>
+</p:sld>
+</file>
+
+<file path=ppt/slides/slide5.xml><?xml version="1.0" encoding="utf-8"?>
+<p:sld xmlns:a="http://schemas.openxmlformats.org/drawingml/2006/main" xmlns:r="http://schemas.openxmlformats.org/officeDocument/2006/relationships" xmlns:p="http://schemas.openxmlformats.org/presentationml/2006/main">
+  <p:cSld>
+    <p:spTree>
+      <p:nvGrpSpPr>
+        <p:cNvPr id="1" name=""/>
+        <p:cNvGrpSpPr/>
+        <p:nvPr/>
+      </p:nvGrpSpPr>
+      <p:grpSpPr>
+        <a:xfrm>
+          <a:off x="0" y="0"/>
+          <a:ext cx="0" cy="0"/>
+          <a:chOff x="0" y="0"/>
+          <a:chExt cx="0" cy="0"/>
+        </a:xfrm>
+      </p:grpSpPr>
+      <p:pic>
+        <p:nvPicPr>
+          <p:cNvPr id="5" name="Picture 4">
+            <a:extLst>
+              <a:ext uri="{FF2B5EF4-FFF2-40B4-BE49-F238E27FC236}">
+                <a16:creationId xmlns:a16="http://schemas.microsoft.com/office/drawing/2014/main" id="{CE8C77F0-F7DC-0C59-FB8E-6A4968293206}"/>
+              </a:ext>
+            </a:extLst>
+          </p:cNvPr>
+          <p:cNvPicPr>
+            <a:picLocks noChangeAspect="1"/>
+          </p:cNvPicPr>
+          <p:nvPr/>
+        </p:nvPicPr>
+        <p:blipFill>
+          <a:blip r:embed="rId2"/>
+          <a:stretch>
+            <a:fillRect/>
+          </a:stretch>
+        </p:blipFill>
+        <p:spPr>
+          <a:xfrm>
+            <a:off x="0" y="152400"/>
+            <a:ext cx="12192000" cy="6553200"/>
+          </a:xfrm>
+          <a:prstGeom prst="rect">
+            <a:avLst/>
+          </a:prstGeom>
+        </p:spPr>
+      </p:pic>
+    </p:spTree>
+    <p:extLst>
+      <p:ext uri="{BB962C8B-B14F-4D97-AF65-F5344CB8AC3E}">
+        <p14:creationId xmlns:p14="http://schemas.microsoft.com/office/powerpoint/2010/main" val="1302481674"/>
+      </p:ext>
+    </p:extLst>
+  </p:cSld>
+  <p:clrMapOvr>
+    <a:masterClrMapping/>
+  </p:clrMapOvr>
+</p:sld>
+</file>
+
+<file path=ppt/slides/slide6.xml><?xml version="1.0" encoding="utf-8"?>
 <p:sld xmlns:a="http://schemas.openxmlformats.org/drawingml/2006/main" xmlns:r="http://schemas.openxmlformats.org/officeDocument/2006/relationships" xmlns:p="http://schemas.openxmlformats.org/presentationml/2006/main">
   <p:cSld>
     <p:spTree>

--- a/docs/dda_impurity.pptx
+++ b/docs/dda_impurity.pptx
@@ -11,6 +11,7 @@
     <p:sldId id="261" r:id="rId5"/>
     <p:sldId id="260" r:id="rId6"/>
     <p:sldId id="259" r:id="rId7"/>
+    <p:sldId id="262" r:id="rId8"/>
   </p:sldIdLst>
   <p:sldSz cx="12192000" cy="6858000"/>
   <p:notesSz cx="6858000" cy="9144000"/>
@@ -266,7 +267,7 @@
           <a:p>
             <a:fld id="{4AD6CE59-DF2D-4B5B-9BC5-C1E946ABEF32}" type="datetimeFigureOut">
               <a:rPr lang="en-AT" smtClean="0"/>
-              <a:t>07/22/2025</a:t>
+              <a:t>22/07/2025</a:t>
             </a:fld>
             <a:endParaRPr lang="en-AT"/>
           </a:p>
@@ -466,7 +467,7 @@
           <a:p>
             <a:fld id="{4AD6CE59-DF2D-4B5B-9BC5-C1E946ABEF32}" type="datetimeFigureOut">
               <a:rPr lang="en-AT" smtClean="0"/>
-              <a:t>07/22/2025</a:t>
+              <a:t>22/07/2025</a:t>
             </a:fld>
             <a:endParaRPr lang="en-AT"/>
           </a:p>
@@ -676,7 +677,7 @@
           <a:p>
             <a:fld id="{4AD6CE59-DF2D-4B5B-9BC5-C1E946ABEF32}" type="datetimeFigureOut">
               <a:rPr lang="en-AT" smtClean="0"/>
-              <a:t>07/22/2025</a:t>
+              <a:t>22/07/2025</a:t>
             </a:fld>
             <a:endParaRPr lang="en-AT"/>
           </a:p>
@@ -876,7 +877,7 @@
           <a:p>
             <a:fld id="{4AD6CE59-DF2D-4B5B-9BC5-C1E946ABEF32}" type="datetimeFigureOut">
               <a:rPr lang="en-AT" smtClean="0"/>
-              <a:t>07/22/2025</a:t>
+              <a:t>22/07/2025</a:t>
             </a:fld>
             <a:endParaRPr lang="en-AT"/>
           </a:p>
@@ -1152,7 +1153,7 @@
           <a:p>
             <a:fld id="{4AD6CE59-DF2D-4B5B-9BC5-C1E946ABEF32}" type="datetimeFigureOut">
               <a:rPr lang="en-AT" smtClean="0"/>
-              <a:t>07/22/2025</a:t>
+              <a:t>22/07/2025</a:t>
             </a:fld>
             <a:endParaRPr lang="en-AT"/>
           </a:p>
@@ -1420,7 +1421,7 @@
           <a:p>
             <a:fld id="{4AD6CE59-DF2D-4B5B-9BC5-C1E946ABEF32}" type="datetimeFigureOut">
               <a:rPr lang="en-AT" smtClean="0"/>
-              <a:t>07/22/2025</a:t>
+              <a:t>22/07/2025</a:t>
             </a:fld>
             <a:endParaRPr lang="en-AT"/>
           </a:p>
@@ -1835,7 +1836,7 @@
           <a:p>
             <a:fld id="{4AD6CE59-DF2D-4B5B-9BC5-C1E946ABEF32}" type="datetimeFigureOut">
               <a:rPr lang="en-AT" smtClean="0"/>
-              <a:t>07/22/2025</a:t>
+              <a:t>22/07/2025</a:t>
             </a:fld>
             <a:endParaRPr lang="en-AT"/>
           </a:p>
@@ -1977,7 +1978,7 @@
           <a:p>
             <a:fld id="{4AD6CE59-DF2D-4B5B-9BC5-C1E946ABEF32}" type="datetimeFigureOut">
               <a:rPr lang="en-AT" smtClean="0"/>
-              <a:t>07/22/2025</a:t>
+              <a:t>22/07/2025</a:t>
             </a:fld>
             <a:endParaRPr lang="en-AT"/>
           </a:p>
@@ -2090,7 +2091,7 @@
           <a:p>
             <a:fld id="{4AD6CE59-DF2D-4B5B-9BC5-C1E946ABEF32}" type="datetimeFigureOut">
               <a:rPr lang="en-AT" smtClean="0"/>
-              <a:t>07/22/2025</a:t>
+              <a:t>22/07/2025</a:t>
             </a:fld>
             <a:endParaRPr lang="en-AT"/>
           </a:p>
@@ -2403,7 +2404,7 @@
           <a:p>
             <a:fld id="{4AD6CE59-DF2D-4B5B-9BC5-C1E946ABEF32}" type="datetimeFigureOut">
               <a:rPr lang="en-AT" smtClean="0"/>
-              <a:t>07/22/2025</a:t>
+              <a:t>22/07/2025</a:t>
             </a:fld>
             <a:endParaRPr lang="en-AT"/>
           </a:p>
@@ -2692,7 +2693,7 @@
           <a:p>
             <a:fld id="{4AD6CE59-DF2D-4B5B-9BC5-C1E946ABEF32}" type="datetimeFigureOut">
               <a:rPr lang="en-AT" smtClean="0"/>
-              <a:t>07/22/2025</a:t>
+              <a:t>22/07/2025</a:t>
             </a:fld>
             <a:endParaRPr lang="en-AT"/>
           </a:p>
@@ -2935,7 +2936,7 @@
           <a:p>
             <a:fld id="{4AD6CE59-DF2D-4B5B-9BC5-C1E946ABEF32}" type="datetimeFigureOut">
               <a:rPr lang="en-AT" smtClean="0"/>
-              <a:t>07/22/2025</a:t>
+              <a:t>22/07/2025</a:t>
             </a:fld>
             <a:endParaRPr lang="en-AT"/>
           </a:p>
@@ -4218,6 +4219,66 @@
           </a:prstGeom>
         </p:spPr>
       </p:pic>
+      <p:sp>
+        <p:nvSpPr>
+          <p:cNvPr id="2" name="TextBox 1">
+            <a:extLst>
+              <a:ext uri="{FF2B5EF4-FFF2-40B4-BE49-F238E27FC236}">
+                <a16:creationId xmlns:a16="http://schemas.microsoft.com/office/drawing/2014/main" id="{E7639D81-C7CF-6D0C-5BCA-5DEAED6B9A91}"/>
+              </a:ext>
+            </a:extLst>
+          </p:cNvPr>
+          <p:cNvSpPr txBox="1"/>
+          <p:nvPr/>
+        </p:nvSpPr>
+        <p:spPr>
+          <a:xfrm>
+            <a:off x="6154310" y="3562184"/>
+            <a:ext cx="3387255" cy="369332"/>
+          </a:xfrm>
+          <a:prstGeom prst="rect">
+            <a:avLst/>
+          </a:prstGeom>
+          <a:noFill/>
+        </p:spPr>
+        <p:txBody>
+          <a:bodyPr wrap="square" rtlCol="0">
+            <a:spAutoFit/>
+          </a:bodyPr>
+          <a:lstStyle/>
+          <a:p>
+            <a:r>
+              <a:rPr lang="de-AT" dirty="0" err="1">
+                <a:solidFill>
+                  <a:srgbClr val="FF0000"/>
+                </a:solidFill>
+              </a:rPr>
+              <a:t>Closest</a:t>
+            </a:r>
+            <a:r>
+              <a:rPr lang="de-AT" dirty="0">
+                <a:solidFill>
+                  <a:srgbClr val="FF0000"/>
+                </a:solidFill>
+              </a:rPr>
+              <a:t> MS1 </a:t>
+            </a:r>
+            <a:r>
+              <a:rPr lang="de-AT" dirty="0" err="1">
+                <a:solidFill>
+                  <a:srgbClr val="FF0000"/>
+                </a:solidFill>
+              </a:rPr>
+              <a:t>spectrum</a:t>
+            </a:r>
+            <a:endParaRPr lang="en-AT" dirty="0">
+              <a:solidFill>
+                <a:srgbClr val="FF0000"/>
+              </a:solidFill>
+            </a:endParaRPr>
+          </a:p>
+        </p:txBody>
+      </p:sp>
     </p:spTree>
     <p:extLst>
       <p:ext uri="{BB962C8B-B14F-4D97-AF65-F5344CB8AC3E}">
@@ -4278,6 +4339,162 @@
           </a:prstGeom>
         </p:spPr>
       </p:pic>
+      <p:sp>
+        <p:nvSpPr>
+          <p:cNvPr id="2" name="TextBox 1">
+            <a:extLst>
+              <a:ext uri="{FF2B5EF4-FFF2-40B4-BE49-F238E27FC236}">
+                <a16:creationId xmlns:a16="http://schemas.microsoft.com/office/drawing/2014/main" id="{5231DE29-5A4B-4946-DFDD-41F79157CB27}"/>
+              </a:ext>
+            </a:extLst>
+          </p:cNvPr>
+          <p:cNvSpPr txBox="1"/>
+          <p:nvPr/>
+        </p:nvSpPr>
+        <p:spPr>
+          <a:xfrm>
+            <a:off x="5367130" y="3681454"/>
+            <a:ext cx="2369489" cy="646331"/>
+          </a:xfrm>
+          <a:prstGeom prst="rect">
+            <a:avLst/>
+          </a:prstGeom>
+          <a:noFill/>
+        </p:spPr>
+        <p:txBody>
+          <a:bodyPr wrap="square" rtlCol="0">
+            <a:spAutoFit/>
+          </a:bodyPr>
+          <a:lstStyle/>
+          <a:p>
+            <a:r>
+              <a:rPr lang="de-AT" dirty="0">
+                <a:solidFill>
+                  <a:srgbClr val="FF0000"/>
+                </a:solidFill>
+              </a:rPr>
+              <a:t>Zoom in on </a:t>
+            </a:r>
+            <a:r>
+              <a:rPr lang="de-AT" dirty="0" err="1">
+                <a:solidFill>
+                  <a:srgbClr val="FF0000"/>
+                </a:solidFill>
+              </a:rPr>
+              <a:t>peaks</a:t>
+            </a:r>
+            <a:r>
+              <a:rPr lang="de-AT" dirty="0">
+                <a:solidFill>
+                  <a:srgbClr val="FF0000"/>
+                </a:solidFill>
+              </a:rPr>
+              <a:t> in </a:t>
+            </a:r>
+            <a:r>
+              <a:rPr lang="de-AT" dirty="0" err="1">
+                <a:solidFill>
+                  <a:srgbClr val="FF0000"/>
+                </a:solidFill>
+              </a:rPr>
+              <a:t>window</a:t>
+            </a:r>
+            <a:endParaRPr lang="en-AT" dirty="0">
+              <a:solidFill>
+                <a:srgbClr val="FF0000"/>
+              </a:solidFill>
+            </a:endParaRPr>
+          </a:p>
+        </p:txBody>
+      </p:sp>
+      <p:cxnSp>
+        <p:nvCxnSpPr>
+          <p:cNvPr id="4" name="Straight Arrow Connector 3">
+            <a:extLst>
+              <a:ext uri="{FF2B5EF4-FFF2-40B4-BE49-F238E27FC236}">
+                <a16:creationId xmlns:a16="http://schemas.microsoft.com/office/drawing/2014/main" id="{6B64FCB7-AE11-E203-87F9-CDA21353D1C0}"/>
+              </a:ext>
+            </a:extLst>
+          </p:cNvPr>
+          <p:cNvCxnSpPr>
+            <a:cxnSpLocks/>
+          </p:cNvCxnSpPr>
+          <p:nvPr/>
+        </p:nvCxnSpPr>
+        <p:spPr>
+          <a:xfrm flipH="1">
+            <a:off x="3212327" y="3681454"/>
+            <a:ext cx="302150" cy="246490"/>
+          </a:xfrm>
+          <a:prstGeom prst="straightConnector1">
+            <a:avLst/>
+          </a:prstGeom>
+          <a:ln>
+            <a:solidFill>
+              <a:srgbClr val="FF0000"/>
+            </a:solidFill>
+            <a:tailEnd type="triangle"/>
+          </a:ln>
+        </p:spPr>
+        <p:style>
+          <a:lnRef idx="2">
+            <a:schemeClr val="accent1"/>
+          </a:lnRef>
+          <a:fillRef idx="0">
+            <a:schemeClr val="accent1"/>
+          </a:fillRef>
+          <a:effectRef idx="1">
+            <a:schemeClr val="accent1"/>
+          </a:effectRef>
+          <a:fontRef idx="minor">
+            <a:schemeClr val="tx1"/>
+          </a:fontRef>
+        </p:style>
+      </p:cxnSp>
+      <p:sp>
+        <p:nvSpPr>
+          <p:cNvPr id="7" name="TextBox 6">
+            <a:extLst>
+              <a:ext uri="{FF2B5EF4-FFF2-40B4-BE49-F238E27FC236}">
+                <a16:creationId xmlns:a16="http://schemas.microsoft.com/office/drawing/2014/main" id="{371CFC7F-F01A-4579-6D9B-0DF0712DB0B2}"/>
+              </a:ext>
+            </a:extLst>
+          </p:cNvPr>
+          <p:cNvSpPr txBox="1"/>
+          <p:nvPr/>
+        </p:nvSpPr>
+        <p:spPr>
+          <a:xfrm>
+            <a:off x="3490623" y="3496788"/>
+            <a:ext cx="4245996" cy="369332"/>
+          </a:xfrm>
+          <a:prstGeom prst="rect">
+            <a:avLst/>
+          </a:prstGeom>
+          <a:noFill/>
+        </p:spPr>
+        <p:txBody>
+          <a:bodyPr wrap="square" rtlCol="0">
+            <a:spAutoFit/>
+          </a:bodyPr>
+          <a:lstStyle/>
+          <a:p>
+            <a:r>
+              <a:rPr lang="de-AT" dirty="0" err="1">
+                <a:solidFill>
+                  <a:srgbClr val="FF0000"/>
+                </a:solidFill>
+              </a:rPr>
+              <a:t>Precursor</a:t>
+            </a:r>
+            <a:endParaRPr lang="en-AT" dirty="0">
+              <a:solidFill>
+                <a:srgbClr val="FF0000"/>
+              </a:solidFill>
+            </a:endParaRPr>
+          </a:p>
+        </p:txBody>
+      </p:sp>
     </p:spTree>
     <p:extLst>
       <p:ext uri="{BB962C8B-B14F-4D97-AF65-F5344CB8AC3E}">
@@ -4450,8 +4667,8 @@
         </p:nvSpPr>
         <p:spPr>
           <a:xfrm>
-            <a:off x="2323930" y="4230094"/>
-            <a:ext cx="1582309" cy="923330"/>
+            <a:off x="2043485" y="3943847"/>
+            <a:ext cx="1582309" cy="1200329"/>
           </a:xfrm>
           <a:prstGeom prst="rect">
             <a:avLst/>
@@ -4490,7 +4707,27 @@
             </a:r>
             <a:r>
               <a:rPr lang="de-AT" dirty="0"/>
-              <a:t> CSV</a:t>
+              <a:t> CSV / </a:t>
+            </a:r>
+            <a:r>
+              <a:rPr lang="de-AT" dirty="0" err="1"/>
+              <a:t>from</a:t>
+            </a:r>
+            <a:r>
+              <a:rPr lang="de-AT" dirty="0"/>
+              <a:t> </a:t>
+            </a:r>
+            <a:r>
+              <a:rPr lang="de-AT" dirty="0" err="1"/>
+              <a:t>the</a:t>
+            </a:r>
+            <a:r>
+              <a:rPr lang="de-AT" dirty="0"/>
+              <a:t> </a:t>
+            </a:r>
+            <a:r>
+              <a:rPr lang="de-AT" dirty="0" err="1"/>
+              <a:t>script</a:t>
             </a:r>
             <a:endParaRPr lang="en-AT" dirty="0"/>
           </a:p>
@@ -4665,58 +4902,114 @@
           <a:lstStyle/>
           <a:p>
             <a:r>
-              <a:rPr lang="de-AT" dirty="0" err="1"/>
+              <a:rPr lang="de-AT" dirty="0" err="1">
+                <a:solidFill>
+                  <a:srgbClr val="FF0000"/>
+                </a:solidFill>
+              </a:rPr>
               <a:t>Removing</a:t>
             </a:r>
             <a:r>
-              <a:rPr lang="de-AT" dirty="0"/>
+              <a:rPr lang="de-AT" dirty="0">
+                <a:solidFill>
+                  <a:srgbClr val="FF0000"/>
+                </a:solidFill>
+              </a:rPr>
               <a:t> </a:t>
             </a:r>
             <a:r>
-              <a:rPr lang="de-AT" dirty="0" err="1"/>
+              <a:rPr lang="de-AT" dirty="0" err="1">
+                <a:solidFill>
+                  <a:srgbClr val="FF0000"/>
+                </a:solidFill>
+              </a:rPr>
               <a:t>low</a:t>
             </a:r>
             <a:r>
-              <a:rPr lang="de-AT" dirty="0"/>
+              <a:rPr lang="de-AT" dirty="0">
+                <a:solidFill>
+                  <a:srgbClr val="FF0000"/>
+                </a:solidFill>
+              </a:rPr>
               <a:t> </a:t>
             </a:r>
             <a:r>
-              <a:rPr lang="de-AT" dirty="0" err="1"/>
+              <a:rPr lang="de-AT" dirty="0" err="1">
+                <a:solidFill>
+                  <a:srgbClr val="FF0000"/>
+                </a:solidFill>
+              </a:rPr>
               <a:t>intensity</a:t>
             </a:r>
             <a:r>
-              <a:rPr lang="de-AT" dirty="0"/>
+              <a:rPr lang="de-AT" dirty="0">
+                <a:solidFill>
+                  <a:srgbClr val="FF0000"/>
+                </a:solidFill>
+              </a:rPr>
               <a:t> </a:t>
             </a:r>
             <a:r>
-              <a:rPr lang="de-AT" dirty="0" err="1"/>
+              <a:rPr lang="de-AT" dirty="0" err="1">
+                <a:solidFill>
+                  <a:srgbClr val="FF0000"/>
+                </a:solidFill>
+              </a:rPr>
               <a:t>peaks</a:t>
             </a:r>
             <a:r>
-              <a:rPr lang="de-AT" dirty="0"/>
+              <a:rPr lang="de-AT" dirty="0">
+                <a:solidFill>
+                  <a:srgbClr val="FF0000"/>
+                </a:solidFill>
+              </a:rPr>
               <a:t> </a:t>
             </a:r>
             <a:r>
-              <a:rPr lang="de-AT" dirty="0" err="1"/>
+              <a:rPr lang="de-AT" dirty="0" err="1">
+                <a:solidFill>
+                  <a:srgbClr val="FF0000"/>
+                </a:solidFill>
+              </a:rPr>
               <a:t>does</a:t>
             </a:r>
             <a:r>
-              <a:rPr lang="de-AT" dirty="0"/>
+              <a:rPr lang="de-AT" dirty="0">
+                <a:solidFill>
+                  <a:srgbClr val="FF0000"/>
+                </a:solidFill>
+              </a:rPr>
               <a:t> still not </a:t>
             </a:r>
             <a:r>
-              <a:rPr lang="de-AT" dirty="0" err="1"/>
+              <a:rPr lang="de-AT" dirty="0" err="1">
+                <a:solidFill>
+                  <a:srgbClr val="FF0000"/>
+                </a:solidFill>
+              </a:rPr>
               <a:t>yield</a:t>
             </a:r>
             <a:r>
-              <a:rPr lang="de-AT" dirty="0"/>
+              <a:rPr lang="de-AT" dirty="0">
+                <a:solidFill>
+                  <a:srgbClr val="FF0000"/>
+                </a:solidFill>
+              </a:rPr>
               <a:t> 0.7 </a:t>
             </a:r>
             <a:r>
-              <a:rPr lang="de-AT" dirty="0" err="1"/>
+              <a:rPr lang="de-AT" dirty="0" err="1">
+                <a:solidFill>
+                  <a:srgbClr val="FF0000"/>
+                </a:solidFill>
+              </a:rPr>
               <a:t>purity</a:t>
             </a:r>
-            <a:endParaRPr lang="en-AT" dirty="0"/>
+            <a:endParaRPr lang="en-AT" dirty="0">
+              <a:solidFill>
+                <a:srgbClr val="FF0000"/>
+              </a:solidFill>
+            </a:endParaRPr>
           </a:p>
         </p:txBody>
       </p:sp>
@@ -4724,6 +5017,463 @@
     <p:extLst>
       <p:ext uri="{BB962C8B-B14F-4D97-AF65-F5344CB8AC3E}">
         <p14:creationId xmlns:p14="http://schemas.microsoft.com/office/powerpoint/2010/main" val="3324438229"/>
+      </p:ext>
+    </p:extLst>
+  </p:cSld>
+  <p:clrMapOvr>
+    <a:masterClrMapping/>
+  </p:clrMapOvr>
+</p:sld>
+</file>
+
+<file path=ppt/slides/slide7.xml><?xml version="1.0" encoding="utf-8"?>
+<p:sld xmlns:a="http://schemas.openxmlformats.org/drawingml/2006/main" xmlns:r="http://schemas.openxmlformats.org/officeDocument/2006/relationships" xmlns:p="http://schemas.openxmlformats.org/presentationml/2006/main">
+  <p:cSld>
+    <p:spTree>
+      <p:nvGrpSpPr>
+        <p:cNvPr id="1" name=""/>
+        <p:cNvGrpSpPr/>
+        <p:nvPr/>
+      </p:nvGrpSpPr>
+      <p:grpSpPr>
+        <a:xfrm>
+          <a:off x="0" y="0"/>
+          <a:ext cx="0" cy="0"/>
+          <a:chOff x="0" y="0"/>
+          <a:chExt cx="0" cy="0"/>
+        </a:xfrm>
+      </p:grpSpPr>
+      <p:sp>
+        <p:nvSpPr>
+          <p:cNvPr id="2" name="Title 1">
+            <a:extLst>
+              <a:ext uri="{FF2B5EF4-FFF2-40B4-BE49-F238E27FC236}">
+                <a16:creationId xmlns:a16="http://schemas.microsoft.com/office/drawing/2014/main" id="{DAEAC044-ACFD-A440-D0D9-B9A54A56468B}"/>
+              </a:ext>
+            </a:extLst>
+          </p:cNvPr>
+          <p:cNvSpPr>
+            <a:spLocks noGrp="1"/>
+          </p:cNvSpPr>
+          <p:nvPr>
+            <p:ph type="title"/>
+          </p:nvPr>
+        </p:nvSpPr>
+        <p:spPr/>
+        <p:txBody>
+          <a:bodyPr/>
+          <a:lstStyle/>
+          <a:p>
+            <a:r>
+              <a:rPr lang="de-AT" dirty="0" err="1"/>
+              <a:t>Conclusion</a:t>
+            </a:r>
+            <a:endParaRPr lang="en-AT" dirty="0"/>
+          </a:p>
+        </p:txBody>
+      </p:sp>
+      <p:sp>
+        <p:nvSpPr>
+          <p:cNvPr id="3" name="Content Placeholder 2">
+            <a:extLst>
+              <a:ext uri="{FF2B5EF4-FFF2-40B4-BE49-F238E27FC236}">
+                <a16:creationId xmlns:a16="http://schemas.microsoft.com/office/drawing/2014/main" id="{D1AC46D6-2F48-5AA4-A153-48ABC0A91B8E}"/>
+              </a:ext>
+            </a:extLst>
+          </p:cNvPr>
+          <p:cNvSpPr>
+            <a:spLocks noGrp="1"/>
+          </p:cNvSpPr>
+          <p:nvPr>
+            <p:ph idx="1"/>
+          </p:nvPr>
+        </p:nvSpPr>
+        <p:spPr/>
+        <p:txBody>
+          <a:bodyPr/>
+          <a:lstStyle/>
+          <a:p>
+            <a:r>
+              <a:rPr lang="de-AT" dirty="0"/>
+              <a:t>„Filter </a:t>
+            </a:r>
+            <a:r>
+              <a:rPr lang="de-AT" dirty="0" err="1"/>
+              <a:t>Purity</a:t>
+            </a:r>
+            <a:r>
+              <a:rPr lang="de-AT" dirty="0"/>
+              <a:t>“ in </a:t>
+            </a:r>
+            <a:r>
+              <a:rPr lang="de-AT" dirty="0" err="1"/>
+              <a:t>the</a:t>
+            </a:r>
+            <a:r>
+              <a:rPr lang="de-AT" dirty="0"/>
+              <a:t> </a:t>
+            </a:r>
+            <a:r>
+              <a:rPr lang="de-AT" dirty="0" err="1"/>
+              <a:t>method</a:t>
+            </a:r>
+            <a:r>
+              <a:rPr lang="de-AT" dirty="0"/>
+              <a:t> </a:t>
+            </a:r>
+            <a:r>
+              <a:rPr lang="de-AT" dirty="0" err="1"/>
+              <a:t>might</a:t>
+            </a:r>
+            <a:r>
+              <a:rPr lang="de-AT" dirty="0"/>
+              <a:t> not </a:t>
+            </a:r>
+            <a:r>
+              <a:rPr lang="de-AT" dirty="0" err="1"/>
+              <a:t>always</a:t>
+            </a:r>
+            <a:r>
+              <a:rPr lang="de-AT" dirty="0"/>
+              <a:t> </a:t>
+            </a:r>
+            <a:r>
+              <a:rPr lang="de-AT" dirty="0" err="1"/>
+              <a:t>trigger</a:t>
+            </a:r>
+            <a:r>
+              <a:rPr lang="de-AT" dirty="0"/>
+              <a:t> </a:t>
+            </a:r>
+            <a:r>
+              <a:rPr lang="de-AT" dirty="0" err="1"/>
+              <a:t>correctly</a:t>
+            </a:r>
+            <a:r>
+              <a:rPr lang="de-AT" dirty="0"/>
+              <a:t> </a:t>
+            </a:r>
+            <a:r>
+              <a:rPr lang="de-AT" i="1" dirty="0" err="1"/>
+              <a:t>or</a:t>
+            </a:r>
+            <a:endParaRPr lang="de-AT" i="1" dirty="0"/>
+          </a:p>
+          <a:p>
+            <a:r>
+              <a:rPr lang="de-AT" dirty="0" err="1"/>
+              <a:t>Some</a:t>
+            </a:r>
+            <a:r>
+              <a:rPr lang="de-AT" dirty="0"/>
+              <a:t> </a:t>
+            </a:r>
+            <a:r>
+              <a:rPr lang="de-AT" dirty="0" err="1"/>
+              <a:t>other</a:t>
+            </a:r>
+            <a:r>
+              <a:rPr lang="de-AT" dirty="0"/>
+              <a:t> </a:t>
+            </a:r>
+            <a:r>
+              <a:rPr lang="de-AT" dirty="0" err="1"/>
+              <a:t>filter</a:t>
+            </a:r>
+            <a:r>
+              <a:rPr lang="de-AT" dirty="0"/>
+              <a:t> </a:t>
+            </a:r>
+            <a:r>
+              <a:rPr lang="de-AT" dirty="0" err="1"/>
+              <a:t>is</a:t>
+            </a:r>
+            <a:r>
+              <a:rPr lang="de-AT" dirty="0"/>
+              <a:t> also </a:t>
+            </a:r>
+            <a:r>
+              <a:rPr lang="de-AT" dirty="0" err="1"/>
+              <a:t>used</a:t>
+            </a:r>
+            <a:r>
+              <a:rPr lang="de-AT" dirty="0"/>
+              <a:t> </a:t>
+            </a:r>
+            <a:r>
+              <a:rPr lang="de-AT" dirty="0" err="1"/>
+              <a:t>that</a:t>
+            </a:r>
+            <a:r>
+              <a:rPr lang="de-AT" dirty="0"/>
+              <a:t> </a:t>
+            </a:r>
+            <a:r>
+              <a:rPr lang="de-AT" dirty="0" err="1"/>
+              <a:t>excludes</a:t>
+            </a:r>
+            <a:r>
+              <a:rPr lang="de-AT" dirty="0"/>
+              <a:t> </a:t>
+            </a:r>
+            <a:r>
+              <a:rPr lang="de-AT" dirty="0" err="1"/>
+              <a:t>peaks</a:t>
+            </a:r>
+            <a:r>
+              <a:rPr lang="de-AT" dirty="0"/>
+              <a:t> (</a:t>
+            </a:r>
+            <a:r>
+              <a:rPr lang="de-AT" dirty="0" err="1"/>
+              <a:t>noise</a:t>
+            </a:r>
+            <a:r>
+              <a:rPr lang="de-AT" dirty="0"/>
+              <a:t>/</a:t>
+            </a:r>
+            <a:r>
+              <a:rPr lang="de-AT" dirty="0" err="1"/>
+              <a:t>intensity</a:t>
+            </a:r>
+            <a:r>
+              <a:rPr lang="de-AT" dirty="0"/>
+              <a:t> </a:t>
+            </a:r>
+            <a:r>
+              <a:rPr lang="de-AT" dirty="0" err="1"/>
+              <a:t>does</a:t>
+            </a:r>
+            <a:r>
+              <a:rPr lang="de-AT" dirty="0"/>
+              <a:t> not </a:t>
+            </a:r>
+            <a:r>
+              <a:rPr lang="de-AT" dirty="0" err="1"/>
+              <a:t>make</a:t>
+            </a:r>
+            <a:r>
+              <a:rPr lang="de-AT" dirty="0"/>
+              <a:t> sense, </a:t>
+            </a:r>
+            <a:r>
+              <a:rPr lang="de-AT" dirty="0" err="1"/>
+              <a:t>because</a:t>
+            </a:r>
+            <a:r>
+              <a:rPr lang="de-AT" dirty="0"/>
+              <a:t> in </a:t>
+            </a:r>
+            <a:r>
+              <a:rPr lang="de-AT" dirty="0" err="1"/>
+              <a:t>the</a:t>
+            </a:r>
+            <a:r>
+              <a:rPr lang="de-AT" dirty="0"/>
+              <a:t> </a:t>
+            </a:r>
+            <a:r>
+              <a:rPr lang="de-AT" dirty="0" err="1"/>
+              <a:t>shown</a:t>
+            </a:r>
+            <a:r>
+              <a:rPr lang="de-AT" dirty="0"/>
+              <a:t> </a:t>
+            </a:r>
+            <a:r>
+              <a:rPr lang="de-AT" dirty="0" err="1"/>
+              <a:t>example</a:t>
+            </a:r>
+            <a:r>
+              <a:rPr lang="de-AT" dirty="0"/>
+              <a:t> </a:t>
+            </a:r>
+            <a:r>
+              <a:rPr lang="de-AT" dirty="0" err="1"/>
+              <a:t>both</a:t>
+            </a:r>
+            <a:r>
+              <a:rPr lang="de-AT" dirty="0"/>
+              <a:t> </a:t>
+            </a:r>
+            <a:r>
+              <a:rPr lang="de-AT" dirty="0" err="1"/>
+              <a:t>peaks</a:t>
+            </a:r>
+            <a:r>
+              <a:rPr lang="de-AT" dirty="0"/>
+              <a:t> </a:t>
+            </a:r>
+            <a:r>
+              <a:rPr lang="de-AT" dirty="0" err="1"/>
+              <a:t>have</a:t>
+            </a:r>
+            <a:r>
+              <a:rPr lang="de-AT" dirty="0"/>
+              <a:t> </a:t>
+            </a:r>
+            <a:r>
+              <a:rPr lang="de-AT" dirty="0" err="1"/>
+              <a:t>similar</a:t>
+            </a:r>
+            <a:r>
+              <a:rPr lang="de-AT" dirty="0"/>
+              <a:t> </a:t>
+            </a:r>
+            <a:r>
+              <a:rPr lang="de-AT" dirty="0" err="1"/>
+              <a:t>intensity</a:t>
+            </a:r>
+            <a:r>
+              <a:rPr lang="de-AT" dirty="0"/>
+              <a:t>) </a:t>
+            </a:r>
+            <a:r>
+              <a:rPr lang="de-AT" i="1" dirty="0" err="1"/>
+              <a:t>or</a:t>
+            </a:r>
+            <a:endParaRPr lang="de-AT" i="1" dirty="0"/>
+          </a:p>
+          <a:p>
+            <a:r>
+              <a:rPr lang="de-AT" dirty="0"/>
+              <a:t>A different </a:t>
+            </a:r>
+            <a:r>
+              <a:rPr lang="de-AT" dirty="0" err="1"/>
+              <a:t>formula</a:t>
+            </a:r>
+            <a:r>
+              <a:rPr lang="de-AT" dirty="0"/>
+              <a:t> </a:t>
+            </a:r>
+            <a:r>
+              <a:rPr lang="de-AT" dirty="0" err="1"/>
+              <a:t>is</a:t>
+            </a:r>
+            <a:r>
+              <a:rPr lang="de-AT" dirty="0"/>
+              <a:t> </a:t>
+            </a:r>
+            <a:r>
+              <a:rPr lang="de-AT" dirty="0" err="1"/>
+              <a:t>used</a:t>
+            </a:r>
+            <a:r>
+              <a:rPr lang="de-AT" dirty="0"/>
+              <a:t> </a:t>
+            </a:r>
+            <a:r>
+              <a:rPr lang="de-AT" dirty="0" err="1"/>
+              <a:t>for</a:t>
+            </a:r>
+            <a:r>
+              <a:rPr lang="de-AT" dirty="0"/>
+              <a:t> </a:t>
+            </a:r>
+            <a:r>
+              <a:rPr lang="de-AT" dirty="0" err="1"/>
+              <a:t>purity</a:t>
+            </a:r>
+            <a:r>
+              <a:rPr lang="de-AT" dirty="0"/>
+              <a:t> </a:t>
+            </a:r>
+            <a:r>
+              <a:rPr lang="de-AT" dirty="0" err="1"/>
+              <a:t>calculation</a:t>
+            </a:r>
+            <a:r>
+              <a:rPr lang="de-AT" dirty="0"/>
+              <a:t>, e.g. </a:t>
+            </a:r>
+            <a:r>
+              <a:rPr lang="de-AT" dirty="0" err="1"/>
+              <a:t>precursor</a:t>
+            </a:r>
+            <a:r>
+              <a:rPr lang="de-AT" dirty="0"/>
+              <a:t> </a:t>
+            </a:r>
+            <a:r>
+              <a:rPr lang="de-AT" dirty="0" err="1"/>
+              <a:t>divided</a:t>
+            </a:r>
+            <a:r>
+              <a:rPr lang="de-AT" dirty="0"/>
+              <a:t> </a:t>
+            </a:r>
+            <a:r>
+              <a:rPr lang="de-AT" dirty="0" err="1"/>
+              <a:t>by</a:t>
+            </a:r>
+            <a:r>
+              <a:rPr lang="de-AT" dirty="0"/>
+              <a:t> </a:t>
+            </a:r>
+            <a:r>
+              <a:rPr lang="de-AT" dirty="0" err="1"/>
+              <a:t>remaining</a:t>
+            </a:r>
+            <a:r>
+              <a:rPr lang="de-AT" dirty="0"/>
+              <a:t> </a:t>
+            </a:r>
+            <a:r>
+              <a:rPr lang="de-AT" dirty="0" err="1"/>
+              <a:t>intensity</a:t>
+            </a:r>
+            <a:r>
+              <a:rPr lang="de-AT" dirty="0"/>
+              <a:t> in </a:t>
+            </a:r>
+            <a:r>
+              <a:rPr lang="de-AT" dirty="0" err="1"/>
+              <a:t>the</a:t>
+            </a:r>
+            <a:r>
+              <a:rPr lang="de-AT" dirty="0"/>
+              <a:t> </a:t>
+            </a:r>
+            <a:r>
+              <a:rPr lang="de-AT" dirty="0" err="1"/>
+              <a:t>window</a:t>
+            </a:r>
+            <a:r>
+              <a:rPr lang="de-AT" dirty="0"/>
+              <a:t> (</a:t>
+            </a:r>
+            <a:r>
+              <a:rPr lang="de-AT" dirty="0" err="1"/>
+              <a:t>instead</a:t>
+            </a:r>
+            <a:r>
+              <a:rPr lang="de-AT" dirty="0"/>
+              <a:t> </a:t>
+            </a:r>
+            <a:r>
+              <a:rPr lang="de-AT" dirty="0" err="1"/>
+              <a:t>of</a:t>
+            </a:r>
+            <a:r>
+              <a:rPr lang="de-AT" dirty="0"/>
+              <a:t> total </a:t>
+            </a:r>
+            <a:r>
+              <a:rPr lang="de-AT" dirty="0" err="1"/>
+              <a:t>intensity</a:t>
+            </a:r>
+            <a:r>
+              <a:rPr lang="de-AT" dirty="0"/>
+              <a:t>)</a:t>
+            </a:r>
+          </a:p>
+        </p:txBody>
+      </p:sp>
+    </p:spTree>
+    <p:extLst>
+      <p:ext uri="{BB962C8B-B14F-4D97-AF65-F5344CB8AC3E}">
+        <p14:creationId xmlns:p14="http://schemas.microsoft.com/office/powerpoint/2010/main" val="2024511341"/>
       </p:ext>
     </p:extLst>
   </p:cSld>
